--- a/Net-alapu-fejlesztes-prezentacio.pptx
+++ b/Net-alapu-fejlesztes-prezentacio.pptx
@@ -306,7 +306,7 @@
           <a:p>
             <a:fld id="{46053829-1247-4924-BC48-CC12E0E53FE3}" type="datetimeFigureOut">
               <a:rPr lang="hu-HU" smtClean="0"/>
-              <a:t>2025. 05. 23.</a:t>
+              <a:t>2025. 11. 24.</a:t>
             </a:fld>
             <a:endParaRPr lang="hu-HU"/>
           </a:p>
@@ -581,7 +581,7 @@
           <a:p>
             <a:fld id="{46053829-1247-4924-BC48-CC12E0E53FE3}" type="datetimeFigureOut">
               <a:rPr lang="hu-HU" smtClean="0"/>
-              <a:t>2025. 05. 23.</a:t>
+              <a:t>2025. 11. 24.</a:t>
             </a:fld>
             <a:endParaRPr lang="hu-HU"/>
           </a:p>
@@ -775,7 +775,7 @@
           <a:p>
             <a:fld id="{46053829-1247-4924-BC48-CC12E0E53FE3}" type="datetimeFigureOut">
               <a:rPr lang="hu-HU" smtClean="0"/>
-              <a:t>2025. 05. 23.</a:t>
+              <a:t>2025. 11. 24.</a:t>
             </a:fld>
             <a:endParaRPr lang="hu-HU"/>
           </a:p>
@@ -1048,7 +1048,7 @@
           <a:p>
             <a:fld id="{46053829-1247-4924-BC48-CC12E0E53FE3}" type="datetimeFigureOut">
               <a:rPr lang="hu-HU" smtClean="0"/>
-              <a:t>2025. 05. 23.</a:t>
+              <a:t>2025. 11. 24.</a:t>
             </a:fld>
             <a:endParaRPr lang="hu-HU"/>
           </a:p>
@@ -1389,7 +1389,7 @@
           <a:p>
             <a:fld id="{46053829-1247-4924-BC48-CC12E0E53FE3}" type="datetimeFigureOut">
               <a:rPr lang="hu-HU" smtClean="0"/>
-              <a:t>2025. 05. 23.</a:t>
+              <a:t>2025. 11. 24.</a:t>
             </a:fld>
             <a:endParaRPr lang="hu-HU"/>
           </a:p>
@@ -2012,7 +2012,7 @@
           <a:p>
             <a:fld id="{46053829-1247-4924-BC48-CC12E0E53FE3}" type="datetimeFigureOut">
               <a:rPr lang="hu-HU" smtClean="0"/>
-              <a:t>2025. 05. 23.</a:t>
+              <a:t>2025. 11. 24.</a:t>
             </a:fld>
             <a:endParaRPr lang="hu-HU"/>
           </a:p>
@@ -2872,7 +2872,7 @@
           <a:p>
             <a:fld id="{46053829-1247-4924-BC48-CC12E0E53FE3}" type="datetimeFigureOut">
               <a:rPr lang="hu-HU" smtClean="0"/>
-              <a:t>2025. 05. 23.</a:t>
+              <a:t>2025. 11. 24.</a:t>
             </a:fld>
             <a:endParaRPr lang="hu-HU"/>
           </a:p>
@@ -3042,7 +3042,7 @@
           <a:p>
             <a:fld id="{46053829-1247-4924-BC48-CC12E0E53FE3}" type="datetimeFigureOut">
               <a:rPr lang="hu-HU" smtClean="0"/>
-              <a:t>2025. 05. 23.</a:t>
+              <a:t>2025. 11. 24.</a:t>
             </a:fld>
             <a:endParaRPr lang="hu-HU"/>
           </a:p>
@@ -3222,7 +3222,7 @@
           <a:p>
             <a:fld id="{46053829-1247-4924-BC48-CC12E0E53FE3}" type="datetimeFigureOut">
               <a:rPr lang="hu-HU" smtClean="0"/>
-              <a:t>2025. 05. 23.</a:t>
+              <a:t>2025. 11. 24.</a:t>
             </a:fld>
             <a:endParaRPr lang="hu-HU"/>
           </a:p>
@@ -3392,7 +3392,7 @@
           <a:p>
             <a:fld id="{46053829-1247-4924-BC48-CC12E0E53FE3}" type="datetimeFigureOut">
               <a:rPr lang="hu-HU" smtClean="0"/>
-              <a:t>2025. 05. 23.</a:t>
+              <a:t>2025. 11. 24.</a:t>
             </a:fld>
             <a:endParaRPr lang="hu-HU"/>
           </a:p>
@@ -3639,7 +3639,7 @@
           <a:p>
             <a:fld id="{46053829-1247-4924-BC48-CC12E0E53FE3}" type="datetimeFigureOut">
               <a:rPr lang="hu-HU" smtClean="0"/>
-              <a:t>2025. 05. 23.</a:t>
+              <a:t>2025. 11. 24.</a:t>
             </a:fld>
             <a:endParaRPr lang="hu-HU"/>
           </a:p>
@@ -3931,7 +3931,7 @@
           <a:p>
             <a:fld id="{46053829-1247-4924-BC48-CC12E0E53FE3}" type="datetimeFigureOut">
               <a:rPr lang="hu-HU" smtClean="0"/>
-              <a:t>2025. 05. 23.</a:t>
+              <a:t>2025. 11. 24.</a:t>
             </a:fld>
             <a:endParaRPr lang="hu-HU"/>
           </a:p>
@@ -4375,7 +4375,7 @@
           <a:p>
             <a:fld id="{46053829-1247-4924-BC48-CC12E0E53FE3}" type="datetimeFigureOut">
               <a:rPr lang="hu-HU" smtClean="0"/>
-              <a:t>2025. 05. 23.</a:t>
+              <a:t>2025. 11. 24.</a:t>
             </a:fld>
             <a:endParaRPr lang="hu-HU"/>
           </a:p>
@@ -4493,7 +4493,7 @@
           <a:p>
             <a:fld id="{46053829-1247-4924-BC48-CC12E0E53FE3}" type="datetimeFigureOut">
               <a:rPr lang="hu-HU" smtClean="0"/>
-              <a:t>2025. 05. 23.</a:t>
+              <a:t>2025. 11. 24.</a:t>
             </a:fld>
             <a:endParaRPr lang="hu-HU"/>
           </a:p>
@@ -4588,7 +4588,7 @@
           <a:p>
             <a:fld id="{46053829-1247-4924-BC48-CC12E0E53FE3}" type="datetimeFigureOut">
               <a:rPr lang="hu-HU" smtClean="0"/>
-              <a:t>2025. 05. 23.</a:t>
+              <a:t>2025. 11. 24.</a:t>
             </a:fld>
             <a:endParaRPr lang="hu-HU"/>
           </a:p>
@@ -4867,7 +4867,7 @@
           <a:p>
             <a:fld id="{46053829-1247-4924-BC48-CC12E0E53FE3}" type="datetimeFigureOut">
               <a:rPr lang="hu-HU" smtClean="0"/>
-              <a:t>2025. 05. 23.</a:t>
+              <a:t>2025. 11. 24.</a:t>
             </a:fld>
             <a:endParaRPr lang="hu-HU"/>
           </a:p>
@@ -5142,7 +5142,7 @@
           <a:p>
             <a:fld id="{46053829-1247-4924-BC48-CC12E0E53FE3}" type="datetimeFigureOut">
               <a:rPr lang="hu-HU" smtClean="0"/>
-              <a:t>2025. 05. 23.</a:t>
+              <a:t>2025. 11. 24.</a:t>
             </a:fld>
             <a:endParaRPr lang="hu-HU"/>
           </a:p>
@@ -5571,7 +5571,7 @@
           <a:p>
             <a:fld id="{46053829-1247-4924-BC48-CC12E0E53FE3}" type="datetimeFigureOut">
               <a:rPr lang="hu-HU" smtClean="0"/>
-              <a:t>2025. 05. 23.</a:t>
+              <a:t>2025. 11. 24.</a:t>
             </a:fld>
             <a:endParaRPr lang="hu-HU"/>
           </a:p>
@@ -8205,16 +8205,11 @@
               <a:rPr lang="hu-HU" dirty="0" smtClean="0"/>
               <a:t>.</a:t>
             </a:r>
-            <a:endParaRPr lang="hu-HU" dirty="0" smtClean="0"/>
           </a:p>
           <a:p>
             <a:r>
               <a:rPr lang="hu-HU" dirty="0" smtClean="0"/>
-              <a:t>Egyéb tevékenységi funkciók</a:t>
-            </a:r>
-            <a:r>
-              <a:rPr lang="hu-HU" dirty="0" smtClean="0"/>
-              <a:t>.</a:t>
+              <a:t>Egyéb tevékenységi funkciók.</a:t>
             </a:r>
           </a:p>
           <a:p>
